--- a/Tam_Yoke_Weng_Git_Profile.pptx
+++ b/Tam_Yoke_Weng_Git_Profile.pptx
@@ -131,10 +131,25 @@
   <pc:docChgLst>
     <pc:chgData name="Yoke Weng Tam" userId="dd652c120aa0bf80" providerId="LiveId" clId="{8997CA8D-E393-44C9-8DAF-275147F3AE7C}"/>
     <pc:docChg chg="undo custSel modSld">
-      <pc:chgData name="Yoke Weng Tam" userId="dd652c120aa0bf80" providerId="LiveId" clId="{8997CA8D-E393-44C9-8DAF-275147F3AE7C}" dt="2026-09-16T06:43:46.787" v="225" actId="1035"/>
+      <pc:chgData name="Yoke Weng Tam" userId="dd652c120aa0bf80" providerId="LiveId" clId="{8997CA8D-E393-44C9-8DAF-275147F3AE7C}" dt="2026-09-28T03:40:13.593" v="553" actId="20577"/>
       <pc:docMkLst>
         <pc:docMk/>
       </pc:docMkLst>
+      <pc:sldChg chg="modSp mod">
+        <pc:chgData name="Yoke Weng Tam" userId="dd652c120aa0bf80" providerId="LiveId" clId="{8997CA8D-E393-44C9-8DAF-275147F3AE7C}" dt="2026-09-28T03:40:13.593" v="553" actId="20577"/>
+        <pc:sldMkLst>
+          <pc:docMk/>
+          <pc:sldMk cId="0" sldId="256"/>
+        </pc:sldMkLst>
+        <pc:spChg chg="mod">
+          <ac:chgData name="Yoke Weng Tam" userId="dd652c120aa0bf80" providerId="LiveId" clId="{8997CA8D-E393-44C9-8DAF-275147F3AE7C}" dt="2026-09-28T03:40:13.593" v="553" actId="20577"/>
+          <ac:spMkLst>
+            <pc:docMk/>
+            <pc:sldMk cId="0" sldId="256"/>
+            <ac:spMk id="6" creationId="{00000000-0000-0000-0000-000000000000}"/>
+          </ac:spMkLst>
+        </pc:spChg>
+      </pc:sldChg>
       <pc:sldChg chg="modSp mod">
         <pc:chgData name="Yoke Weng Tam" userId="dd652c120aa0bf80" providerId="LiveId" clId="{8997CA8D-E393-44C9-8DAF-275147F3AE7C}" dt="2026-09-16T05:42:00.468" v="89" actId="255"/>
         <pc:sldMkLst>
@@ -183,29 +198,29 @@
         </pc:spChg>
       </pc:sldChg>
       <pc:sldChg chg="delSp modSp mod">
-        <pc:chgData name="Yoke Weng Tam" userId="dd652c120aa0bf80" providerId="LiveId" clId="{8997CA8D-E393-44C9-8DAF-275147F3AE7C}" dt="2026-09-16T06:42:53.090" v="201" actId="207"/>
+        <pc:chgData name="Yoke Weng Tam" userId="dd652c120aa0bf80" providerId="LiveId" clId="{8997CA8D-E393-44C9-8DAF-275147F3AE7C}" dt="2026-09-28T03:38:16.576" v="478" actId="20577"/>
         <pc:sldMkLst>
           <pc:docMk/>
           <pc:sldMk cId="0" sldId="258"/>
         </pc:sldMkLst>
         <pc:spChg chg="mod">
-          <ac:chgData name="Yoke Weng Tam" userId="dd652c120aa0bf80" providerId="LiveId" clId="{8997CA8D-E393-44C9-8DAF-275147F3AE7C}" dt="2026-09-16T05:43:28.498" v="91" actId="255"/>
+          <ac:chgData name="Yoke Weng Tam" userId="dd652c120aa0bf80" providerId="LiveId" clId="{8997CA8D-E393-44C9-8DAF-275147F3AE7C}" dt="2026-09-28T03:26:07.905" v="265" actId="14100"/>
+          <ac:spMkLst>
+            <pc:docMk/>
+            <pc:sldMk cId="0" sldId="258"/>
+            <ac:spMk id="7" creationId="{00000000-0000-0000-0000-000000000000}"/>
+          </ac:spMkLst>
+        </pc:spChg>
+        <pc:spChg chg="mod">
+          <ac:chgData name="Yoke Weng Tam" userId="dd652c120aa0bf80" providerId="LiveId" clId="{8997CA8D-E393-44C9-8DAF-275147F3AE7C}" dt="2026-09-28T03:35:01.310" v="319" actId="14100"/>
           <ac:spMkLst>
             <pc:docMk/>
             <pc:sldMk cId="0" sldId="258"/>
             <ac:spMk id="8" creationId="{00000000-0000-0000-0000-000000000000}"/>
           </ac:spMkLst>
         </pc:spChg>
-        <pc:spChg chg="del mod">
-          <ac:chgData name="Yoke Weng Tam" userId="dd652c120aa0bf80" providerId="LiveId" clId="{8997CA8D-E393-44C9-8DAF-275147F3AE7C}" dt="2026-09-16T05:43:50.239" v="130" actId="478"/>
-          <ac:spMkLst>
-            <pc:docMk/>
-            <pc:sldMk cId="0" sldId="258"/>
-            <ac:spMk id="9" creationId="{00000000-0000-0000-0000-000000000000}"/>
-          </ac:spMkLst>
-        </pc:spChg>
         <pc:spChg chg="mod">
-          <ac:chgData name="Yoke Weng Tam" userId="dd652c120aa0bf80" providerId="LiveId" clId="{8997CA8D-E393-44C9-8DAF-275147F3AE7C}" dt="2026-09-16T05:43:37.021" v="108" actId="1036"/>
+          <ac:chgData name="Yoke Weng Tam" userId="dd652c120aa0bf80" providerId="LiveId" clId="{8997CA8D-E393-44C9-8DAF-275147F3AE7C}" dt="2026-09-28T03:37:40.118" v="432" actId="1035"/>
           <ac:spMkLst>
             <pc:docMk/>
             <pc:sldMk cId="0" sldId="258"/>
@@ -213,11 +228,27 @@
           </ac:spMkLst>
         </pc:spChg>
         <pc:spChg chg="mod">
-          <ac:chgData name="Yoke Weng Tam" userId="dd652c120aa0bf80" providerId="LiveId" clId="{8997CA8D-E393-44C9-8DAF-275147F3AE7C}" dt="2026-09-16T05:44:01.451" v="131" actId="255"/>
+          <ac:chgData name="Yoke Weng Tam" userId="dd652c120aa0bf80" providerId="LiveId" clId="{8997CA8D-E393-44C9-8DAF-275147F3AE7C}" dt="2026-09-28T03:37:40.118" v="432" actId="1035"/>
+          <ac:spMkLst>
+            <pc:docMk/>
+            <pc:sldMk cId="0" sldId="258"/>
+            <ac:spMk id="11" creationId="{00000000-0000-0000-0000-000000000000}"/>
+          </ac:spMkLst>
+        </pc:spChg>
+        <pc:spChg chg="mod">
+          <ac:chgData name="Yoke Weng Tam" userId="dd652c120aa0bf80" providerId="LiveId" clId="{8997CA8D-E393-44C9-8DAF-275147F3AE7C}" dt="2026-09-28T03:38:16.576" v="478" actId="20577"/>
           <ac:spMkLst>
             <pc:docMk/>
             <pc:sldMk cId="0" sldId="258"/>
             <ac:spMk id="12" creationId="{00000000-0000-0000-0000-000000000000}"/>
+          </ac:spMkLst>
+        </pc:spChg>
+        <pc:spChg chg="mod">
+          <ac:chgData name="Yoke Weng Tam" userId="dd652c120aa0bf80" providerId="LiveId" clId="{8997CA8D-E393-44C9-8DAF-275147F3AE7C}" dt="2026-09-28T03:38:01.178" v="473" actId="1035"/>
+          <ac:spMkLst>
+            <pc:docMk/>
+            <pc:sldMk cId="0" sldId="258"/>
+            <ac:spMk id="13" creationId="{00000000-0000-0000-0000-000000000000}"/>
           </ac:spMkLst>
         </pc:spChg>
         <pc:spChg chg="mod">
@@ -333,13 +364,21 @@
         </pc:spChg>
       </pc:sldChg>
       <pc:sldChg chg="delSp modSp mod">
-        <pc:chgData name="Yoke Weng Tam" userId="dd652c120aa0bf80" providerId="LiveId" clId="{8997CA8D-E393-44C9-8DAF-275147F3AE7C}" dt="2026-09-16T06:43:46.787" v="225" actId="1035"/>
+        <pc:chgData name="Yoke Weng Tam" userId="dd652c120aa0bf80" providerId="LiveId" clId="{8997CA8D-E393-44C9-8DAF-275147F3AE7C}" dt="2026-09-28T03:39:26.357" v="537" actId="20577"/>
         <pc:sldMkLst>
           <pc:docMk/>
           <pc:sldMk cId="0" sldId="260"/>
         </pc:sldMkLst>
         <pc:spChg chg="mod">
-          <ac:chgData name="Yoke Weng Tam" userId="dd652c120aa0bf80" providerId="LiveId" clId="{8997CA8D-E393-44C9-8DAF-275147F3AE7C}" dt="2026-09-16T05:36:45.528" v="73" actId="255"/>
+          <ac:chgData name="Yoke Weng Tam" userId="dd652c120aa0bf80" providerId="LiveId" clId="{8997CA8D-E393-44C9-8DAF-275147F3AE7C}" dt="2026-09-28T03:39:03.183" v="513" actId="20577"/>
+          <ac:spMkLst>
+            <pc:docMk/>
+            <pc:sldMk cId="0" sldId="260"/>
+            <ac:spMk id="6" creationId="{00000000-0000-0000-0000-000000000000}"/>
+          </ac:spMkLst>
+        </pc:spChg>
+        <pc:spChg chg="mod">
+          <ac:chgData name="Yoke Weng Tam" userId="dd652c120aa0bf80" providerId="LiveId" clId="{8997CA8D-E393-44C9-8DAF-275147F3AE7C}" dt="2026-09-28T03:39:26.357" v="537" actId="20577"/>
           <ac:spMkLst>
             <pc:docMk/>
             <pc:sldMk cId="0" sldId="260"/>
@@ -362,14 +401,6 @@
             <ac:spMk id="15" creationId="{00000000-0000-0000-0000-000000000000}"/>
           </ac:spMkLst>
         </pc:spChg>
-        <pc:spChg chg="del mod">
-          <ac:chgData name="Yoke Weng Tam" userId="dd652c120aa0bf80" providerId="LiveId" clId="{8997CA8D-E393-44C9-8DAF-275147F3AE7C}" dt="2026-09-16T06:05:08.566" v="193" actId="478"/>
-          <ac:spMkLst>
-            <pc:docMk/>
-            <pc:sldMk cId="0" sldId="260"/>
-            <ac:spMk id="18" creationId="{00000000-0000-0000-0000-000000000000}"/>
-          </ac:spMkLst>
-        </pc:spChg>
         <pc:spChg chg="mod">
           <ac:chgData name="Yoke Weng Tam" userId="dd652c120aa0bf80" providerId="LiveId" clId="{8997CA8D-E393-44C9-8DAF-275147F3AE7C}" dt="2026-09-16T05:38:14.442" v="79" actId="20577"/>
           <ac:spMkLst>
@@ -384,14 +415,6 @@
             <pc:docMk/>
             <pc:sldMk cId="0" sldId="260"/>
             <ac:spMk id="23" creationId="{00000000-0000-0000-0000-000000000000}"/>
-          </ac:spMkLst>
-        </pc:spChg>
-        <pc:spChg chg="del">
-          <ac:chgData name="Yoke Weng Tam" userId="dd652c120aa0bf80" providerId="LiveId" clId="{8997CA8D-E393-44C9-8DAF-275147F3AE7C}" dt="2026-09-16T06:05:16.706" v="194" actId="478"/>
-          <ac:spMkLst>
-            <pc:docMk/>
-            <pc:sldMk cId="0" sldId="260"/>
-            <ac:spMk id="26" creationId="{00000000-0000-0000-0000-000000000000}"/>
           </ac:spMkLst>
         </pc:spChg>
       </pc:sldChg>
@@ -1644,7 +1667,7 @@
                 <a:ea typeface="Calibri" pitchFamily="34" charset="-122"/>
                 <a:cs typeface="Calibri" pitchFamily="34" charset="-120"/>
               </a:rPr>
-              <a:t>30 years of analog IC design — spanning design, tapeouts, silicon validation, and technical documentation — now extending into cloud infrastructure and DevOps.</a:t>
+              <a:t>More than 25 years of analog IC design — spanning design, tapeouts, silicon validation, and technical documentation — now extending into cloud infrastructure and DevOps.</a:t>
             </a:r>
             <a:endParaRPr lang="en-US" sz="1450" dirty="0"/>
           </a:p>
@@ -2716,7 +2739,7 @@
         <p:spPr>
           <a:xfrm>
             <a:off x="1371600" y="2258568"/>
-            <a:ext cx="4389120" cy="411480"/>
+            <a:ext cx="4590288" cy="411480"/>
           </a:xfrm>
           <a:prstGeom prst="rect">
             <a:avLst/>
@@ -2740,7 +2763,18 @@
                 <a:ea typeface="Cambria" pitchFamily="34" charset="-122"/>
                 <a:cs typeface="Cambria" pitchFamily="34" charset="-120"/>
               </a:rPr>
-              <a:t>Azure Cloud flask_app</a:t>
+              <a:t>Azure Cloud </a:t>
+            </a:r>
+            <a:r>
+              <a:rPr lang="en-US" b="1" dirty="0">
+                <a:solidFill>
+                  <a:srgbClr val="1E2761"/>
+                </a:solidFill>
+                <a:latin typeface="Cambria" pitchFamily="34" charset="0"/>
+                <a:ea typeface="Cambria" pitchFamily="34" charset="-122"/>
+                <a:cs typeface="Cambria" pitchFamily="34" charset="-120"/>
+              </a:rPr>
+              <a:t>Logistic Management System</a:t>
             </a:r>
             <a:endParaRPr lang="en-US" sz="1800" dirty="0"/>
           </a:p>
@@ -2755,7 +2789,7 @@
         <p:spPr>
           <a:xfrm>
             <a:off x="640080" y="2880360"/>
-            <a:ext cx="5120640" cy="1234440"/>
+            <a:ext cx="5120640" cy="1393952"/>
           </a:xfrm>
           <a:prstGeom prst="rect">
             <a:avLst/>
@@ -2782,7 +2816,7 @@
                 <a:ea typeface="Calibri" pitchFamily="34" charset="-122"/>
                 <a:cs typeface="Calibri" pitchFamily="34" charset="-120"/>
               </a:rPr>
-              <a:t>A Flask-based web service deployed to Azure with a full CI/CD pipeline and infrastructure-as-code, demonstrating practical automation and operational monitoring.</a:t>
+              <a:t>A Flask-based web service deployed to Azure with a full CI/CD pipeline and Platform as a Service, demonstrating practical automation and operational monitoring.</a:t>
             </a:r>
             <a:endParaRPr lang="en-US" dirty="0"/>
           </a:p>
@@ -2796,7 +2830,7 @@
         </p:nvSpPr>
         <p:spPr>
           <a:xfrm>
-            <a:off x="868680" y="4566920"/>
+            <a:off x="868680" y="4385091"/>
             <a:ext cx="4754880" cy="320040"/>
           </a:xfrm>
           <a:prstGeom prst="rect">
@@ -2835,7 +2869,7 @@
         </p:nvSpPr>
         <p:spPr>
           <a:xfrm>
-            <a:off x="640080" y="4654296"/>
+            <a:off x="640080" y="4472467"/>
             <a:ext cx="82296" cy="82296"/>
           </a:xfrm>
           <a:prstGeom prst="ellipse">
@@ -2855,7 +2889,7 @@
         </p:nvSpPr>
         <p:spPr>
           <a:xfrm>
-            <a:off x="868680" y="4950968"/>
+            <a:off x="868680" y="4836674"/>
             <a:ext cx="4754880" cy="320040"/>
           </a:xfrm>
           <a:prstGeom prst="rect">
@@ -2880,7 +2914,7 @@
                 <a:ea typeface="Calibri" pitchFamily="34" charset="-122"/>
                 <a:cs typeface="Calibri" pitchFamily="34" charset="-120"/>
               </a:rPr>
-              <a:t>Azure App Services &amp; Storage</a:t>
+              <a:t>Azure App Services, MySQL storage, Virtual Network, Virtual Machine, Entra ID and </a:t>
             </a:r>
             <a:endParaRPr lang="en-US" dirty="0"/>
           </a:p>
@@ -2894,7 +2928,7 @@
         </p:nvSpPr>
         <p:spPr>
           <a:xfrm>
-            <a:off x="640080" y="5038344"/>
+            <a:off x="640080" y="4820142"/>
             <a:ext cx="82296" cy="82296"/>
           </a:xfrm>
           <a:prstGeom prst="ellipse">
@@ -4487,7 +4521,7 @@
                 <a:ea typeface="Cambria" pitchFamily="34" charset="-122"/>
                 <a:cs typeface="Cambria" pitchFamily="34" charset="-120"/>
               </a:rPr>
-              <a:t>Azure Cloud flask_app</a:t>
+              <a:t>Azure Cloud Logistic Management System</a:t>
             </a:r>
             <a:endParaRPr lang="en-US" sz="1550" dirty="0"/>
           </a:p>
